--- a/Paper/报告/6_4-8腾讯汇报.pptx
+++ b/Paper/报告/6_4-8腾讯汇报.pptx
@@ -216,7 +216,7 @@
           <a:p>
             <a:fld id="{BB503B35-3CCA-4E00-9C00-5A848D20FD36}" type="datetimeFigureOut">
               <a:rPr lang="zh-CN" altLang="en-US" smtClean="0"/>
-              <a:t>2024/4/8</a:t>
+              <a:t>2024/5/28</a:t>
             </a:fld>
             <a:endParaRPr lang="zh-CN" altLang="en-US"/>
           </a:p>
@@ -5242,7 +5242,7 @@
           <a:p>
             <a:fld id="{A0040790-74FE-4212-A615-F89461BB8B94}" type="datetimeFigureOut">
               <a:rPr lang="zh-CN" altLang="en-US" smtClean="0"/>
-              <a:t>2024/4/8</a:t>
+              <a:t>2024/5/28</a:t>
             </a:fld>
             <a:endParaRPr lang="zh-CN" altLang="en-US"/>
           </a:p>
@@ -5440,7 +5440,7 @@
           <a:p>
             <a:fld id="{A0040790-74FE-4212-A615-F89461BB8B94}" type="datetimeFigureOut">
               <a:rPr lang="zh-CN" altLang="en-US" smtClean="0"/>
-              <a:t>2024/4/8</a:t>
+              <a:t>2024/5/28</a:t>
             </a:fld>
             <a:endParaRPr lang="zh-CN" altLang="en-US"/>
           </a:p>
@@ -5648,7 +5648,7 @@
           <a:p>
             <a:fld id="{A0040790-74FE-4212-A615-F89461BB8B94}" type="datetimeFigureOut">
               <a:rPr lang="zh-CN" altLang="en-US" smtClean="0"/>
-              <a:t>2024/4/8</a:t>
+              <a:t>2024/5/28</a:t>
             </a:fld>
             <a:endParaRPr lang="zh-CN" altLang="en-US"/>
           </a:p>
@@ -5796,7 +5796,7 @@
           <a:p>
             <a:fld id="{A0040790-74FE-4212-A615-F89461BB8B94}" type="datetimeFigureOut">
               <a:rPr lang="zh-CN" altLang="en-US" smtClean="0"/>
-              <a:t>2024/4/8</a:t>
+              <a:t>2024/5/28</a:t>
             </a:fld>
             <a:endParaRPr lang="zh-CN" altLang="en-US"/>
           </a:p>
@@ -5994,7 +5994,7 @@
           <a:p>
             <a:fld id="{A0040790-74FE-4212-A615-F89461BB8B94}" type="datetimeFigureOut">
               <a:rPr lang="zh-CN" altLang="en-US" smtClean="0"/>
-              <a:t>2024/4/8</a:t>
+              <a:t>2024/5/28</a:t>
             </a:fld>
             <a:endParaRPr lang="zh-CN" altLang="en-US"/>
           </a:p>
@@ -6269,7 +6269,7 @@
           <a:p>
             <a:fld id="{A0040790-74FE-4212-A615-F89461BB8B94}" type="datetimeFigureOut">
               <a:rPr lang="zh-CN" altLang="en-US" smtClean="0"/>
-              <a:t>2024/4/8</a:t>
+              <a:t>2024/5/28</a:t>
             </a:fld>
             <a:endParaRPr lang="zh-CN" altLang="en-US"/>
           </a:p>
@@ -6534,7 +6534,7 @@
           <a:p>
             <a:fld id="{A0040790-74FE-4212-A615-F89461BB8B94}" type="datetimeFigureOut">
               <a:rPr lang="zh-CN" altLang="en-US" smtClean="0"/>
-              <a:t>2024/4/8</a:t>
+              <a:t>2024/5/28</a:t>
             </a:fld>
             <a:endParaRPr lang="zh-CN" altLang="en-US"/>
           </a:p>
@@ -6946,7 +6946,7 @@
           <a:p>
             <a:fld id="{A0040790-74FE-4212-A615-F89461BB8B94}" type="datetimeFigureOut">
               <a:rPr lang="zh-CN" altLang="en-US" smtClean="0"/>
-              <a:t>2024/4/8</a:t>
+              <a:t>2024/5/28</a:t>
             </a:fld>
             <a:endParaRPr lang="zh-CN" altLang="en-US"/>
           </a:p>
@@ -7087,7 +7087,7 @@
           <a:p>
             <a:fld id="{A0040790-74FE-4212-A615-F89461BB8B94}" type="datetimeFigureOut">
               <a:rPr lang="zh-CN" altLang="en-US" smtClean="0"/>
-              <a:t>2024/4/8</a:t>
+              <a:t>2024/5/28</a:t>
             </a:fld>
             <a:endParaRPr lang="zh-CN" altLang="en-US"/>
           </a:p>
@@ -7200,7 +7200,7 @@
           <a:p>
             <a:fld id="{A0040790-74FE-4212-A615-F89461BB8B94}" type="datetimeFigureOut">
               <a:rPr lang="zh-CN" altLang="en-US" smtClean="0"/>
-              <a:t>2024/4/8</a:t>
+              <a:t>2024/5/28</a:t>
             </a:fld>
             <a:endParaRPr lang="zh-CN" altLang="en-US"/>
           </a:p>
@@ -7511,7 +7511,7 @@
           <a:p>
             <a:fld id="{A0040790-74FE-4212-A615-F89461BB8B94}" type="datetimeFigureOut">
               <a:rPr lang="zh-CN" altLang="en-US" smtClean="0"/>
-              <a:t>2024/4/8</a:t>
+              <a:t>2024/5/28</a:t>
             </a:fld>
             <a:endParaRPr lang="zh-CN" altLang="en-US"/>
           </a:p>
@@ -7799,7 +7799,7 @@
           <a:p>
             <a:fld id="{A0040790-74FE-4212-A615-F89461BB8B94}" type="datetimeFigureOut">
               <a:rPr lang="zh-CN" altLang="en-US" smtClean="0"/>
-              <a:t>2024/4/8</a:t>
+              <a:t>2024/5/28</a:t>
             </a:fld>
             <a:endParaRPr lang="zh-CN" altLang="en-US"/>
           </a:p>
@@ -8040,7 +8040,7 @@
           <a:p>
             <a:fld id="{A0040790-74FE-4212-A615-F89461BB8B94}" type="datetimeFigureOut">
               <a:rPr lang="zh-CN" altLang="en-US" smtClean="0"/>
-              <a:t>2024/4/8</a:t>
+              <a:t>2024/5/28</a:t>
             </a:fld>
             <a:endParaRPr lang="zh-CN" altLang="en-US"/>
           </a:p>
@@ -9135,7 +9135,7 @@
                 <a:tabLst/>
                 <a:defRPr/>
               </a:pPr>
-              <a:t>April 8, 2024</a:t>
+              <a:t>May 28, 2024</a:t>
             </a:fld>
             <a:endParaRPr kumimoji="0" lang="zh-CN" altLang="en-US" sz="1400" b="1" i="0" u="none" strike="noStrike" kern="1200" cap="none" spc="0" normalizeH="0" baseline="0" noProof="0" dirty="0">
               <a:ln>
@@ -9877,7 +9877,7 @@
                 <a:latin typeface="Constantia" panose="02030602050306030303" pitchFamily="18" charset="0"/>
                 <a:cs typeface="Times" panose="02020603050405020304" pitchFamily="18" charset="0"/>
               </a:rPr>
-              <a:t>April 8, 2024</a:t>
+              <a:t>May 28, 2024</a:t>
             </a:fld>
             <a:endParaRPr lang="zh-CN" altLang="en-US" sz="1400" b="1" dirty="0">
               <a:solidFill>
@@ -10770,7 +10770,7 @@
                 <a:latin typeface="Constantia" panose="02030602050306030303" pitchFamily="18" charset="0"/>
                 <a:cs typeface="Times" panose="02020603050405020304" pitchFamily="18" charset="0"/>
               </a:rPr>
-              <a:t>April 8, 2024</a:t>
+              <a:t>May 28, 2024</a:t>
             </a:fld>
             <a:endParaRPr lang="zh-CN" altLang="en-US" sz="1400" b="1" dirty="0">
               <a:solidFill>
@@ -11505,7 +11505,7 @@
                 <a:latin typeface="Constantia" panose="02030602050306030303" pitchFamily="18" charset="0"/>
                 <a:cs typeface="Times" panose="02020603050405020304" pitchFamily="18" charset="0"/>
               </a:rPr>
-              <a:t>April 8, 2024</a:t>
+              <a:t>May 28, 2024</a:t>
             </a:fld>
             <a:endParaRPr lang="zh-CN" altLang="en-US" sz="1400" b="1" dirty="0">
               <a:solidFill>
@@ -12228,7 +12228,7 @@
                 <a:latin typeface="Constantia" panose="02030602050306030303" pitchFamily="18" charset="0"/>
                 <a:cs typeface="Times" panose="02020603050405020304" pitchFamily="18" charset="0"/>
               </a:rPr>
-              <a:t>April 8, 2024</a:t>
+              <a:t>May 28, 2024</a:t>
             </a:fld>
             <a:endParaRPr lang="zh-CN" altLang="en-US" sz="1400" b="1" dirty="0">
               <a:solidFill>
@@ -13600,7 +13600,7 @@
                 <a:latin typeface="Constantia" panose="02030602050306030303" pitchFamily="18" charset="0"/>
                 <a:cs typeface="Times" panose="02020603050405020304" pitchFamily="18" charset="0"/>
               </a:rPr>
-              <a:t>April 8, 2024</a:t>
+              <a:t>May 28, 2024</a:t>
             </a:fld>
             <a:endParaRPr lang="zh-CN" altLang="en-US" sz="1400" b="1" dirty="0">
               <a:solidFill>
@@ -14536,7 +14536,7 @@
                 <a:latin typeface="Constantia" panose="02030602050306030303" pitchFamily="18" charset="0"/>
                 <a:cs typeface="Times" panose="02020603050405020304" pitchFamily="18" charset="0"/>
               </a:rPr>
-              <a:t>April 8, 2024</a:t>
+              <a:t>May 28, 2024</a:t>
             </a:fld>
             <a:endParaRPr lang="zh-CN" altLang="en-US" sz="1400" b="1" dirty="0">
               <a:solidFill>
@@ -15573,7 +15573,7 @@
                 <a:latin typeface="Constantia" panose="02030602050306030303" pitchFamily="18" charset="0"/>
                 <a:cs typeface="Times" panose="02020603050405020304" pitchFamily="18" charset="0"/>
               </a:rPr>
-              <a:t>April 8, 2024</a:t>
+              <a:t>May 28, 2024</a:t>
             </a:fld>
             <a:endParaRPr lang="zh-CN" altLang="en-US" sz="1400" b="1" dirty="0">
               <a:solidFill>
@@ -16372,7 +16372,7 @@
                 <a:latin typeface="Constantia" panose="02030602050306030303" pitchFamily="18" charset="0"/>
                 <a:cs typeface="Times" panose="02020603050405020304" pitchFamily="18" charset="0"/>
               </a:rPr>
-              <a:t>April 8, 2024</a:t>
+              <a:t>May 28, 2024</a:t>
             </a:fld>
             <a:endParaRPr lang="zh-CN" altLang="en-US" sz="1400" b="1" dirty="0">
               <a:solidFill>
@@ -17113,7 +17113,7 @@
                 <a:latin typeface="Constantia" panose="02030602050306030303" pitchFamily="18" charset="0"/>
                 <a:cs typeface="Times" panose="02020603050405020304" pitchFamily="18" charset="0"/>
               </a:rPr>
-              <a:t>April 8, 2024</a:t>
+              <a:t>May 28, 2024</a:t>
             </a:fld>
             <a:endParaRPr lang="zh-CN" altLang="en-US" sz="1400" b="1" dirty="0">
               <a:solidFill>
@@ -17700,7 +17700,7 @@
                 <a:latin typeface="Constantia" panose="02030602050306030303" pitchFamily="18" charset="0"/>
                 <a:cs typeface="Times" panose="02020603050405020304" pitchFamily="18" charset="0"/>
               </a:rPr>
-              <a:t>April 8, 2024</a:t>
+              <a:t>May 28, 2024</a:t>
             </a:fld>
             <a:endParaRPr lang="zh-CN" altLang="en-US" sz="1400" b="1" dirty="0">
               <a:solidFill>
@@ -18657,7 +18657,7 @@
                 <a:latin typeface="Constantia" panose="02030602050306030303" pitchFamily="18" charset="0"/>
                 <a:cs typeface="Times" panose="02020603050405020304" pitchFamily="18" charset="0"/>
               </a:rPr>
-              <a:t>April 8, 2024</a:t>
+              <a:t>May 28, 2024</a:t>
             </a:fld>
             <a:endParaRPr lang="zh-CN" altLang="en-US" sz="1400" b="1" dirty="0">
               <a:solidFill>
@@ -19390,13 +19390,22 @@
               <a:buChar char="q"/>
             </a:pPr>
             <a:r>
-              <a:rPr lang="zh-CN" altLang="en-US" sz="1800" dirty="0">
+              <a:rPr lang="zh-CN" altLang="en-US" dirty="0">
                 <a:solidFill>
                   <a:srgbClr val="374151"/>
                 </a:solidFill>
                 <a:latin typeface="_5b8b_4f53"/>
               </a:rPr>
-              <a:t>在应用上，</a:t>
+              <a:t>在应用上，尽可能变随机写为顺序写，例如各种</a:t>
+            </a:r>
+            <a:r>
+              <a:rPr lang="en-US" altLang="zh-CN" dirty="0">
+                <a:solidFill>
+                  <a:srgbClr val="374151"/>
+                </a:solidFill>
+                <a:latin typeface="_5b8b_4f53"/>
+              </a:rPr>
+              <a:t>LSM-tree</a:t>
             </a:r>
             <a:r>
               <a:rPr lang="zh-CN" altLang="en-US" dirty="0">
@@ -19405,36 +19414,9 @@
                 </a:solidFill>
                 <a:latin typeface="_5b8b_4f53"/>
               </a:rPr>
-              <a:t>尽可能</a:t>
-            </a:r>
-            <a:r>
-              <a:rPr lang="zh-CN" altLang="en-US" sz="1800" dirty="0">
-                <a:solidFill>
-                  <a:srgbClr val="374151"/>
-                </a:solidFill>
-                <a:latin typeface="_5b8b_4f53"/>
-              </a:rPr>
-              <a:t>变随机写为顺序写，例如各种</a:t>
-            </a:r>
-            <a:r>
-              <a:rPr lang="en-US" altLang="zh-CN" sz="1800" dirty="0">
-                <a:solidFill>
-                  <a:srgbClr val="374151"/>
-                </a:solidFill>
-                <a:latin typeface="_5b8b_4f53"/>
-              </a:rPr>
-              <a:t>LSM-tree</a:t>
-            </a:r>
-            <a:r>
-              <a:rPr lang="zh-CN" altLang="en-US" sz="1800" dirty="0">
-                <a:solidFill>
-                  <a:srgbClr val="374151"/>
-                </a:solidFill>
-                <a:latin typeface="_5b8b_4f53"/>
-              </a:rPr>
               <a:t>型存储引擎；</a:t>
             </a:r>
-            <a:endParaRPr lang="en-US" altLang="zh-CN" sz="1800" dirty="0">
+            <a:endParaRPr lang="en-US" altLang="zh-CN" dirty="0">
               <a:solidFill>
                 <a:srgbClr val="374151"/>
               </a:solidFill>
@@ -20098,7 +20080,7 @@
                 <a:latin typeface="Constantia" panose="02030602050306030303" pitchFamily="18" charset="0"/>
                 <a:cs typeface="Times" panose="02020603050405020304" pitchFamily="18" charset="0"/>
               </a:rPr>
-              <a:t>April 8, 2024</a:t>
+              <a:t>May 28, 2024</a:t>
             </a:fld>
             <a:endParaRPr lang="zh-CN" altLang="en-US" sz="1400" b="1" dirty="0">
               <a:solidFill>
@@ -20898,7 +20880,7 @@
                 <a:latin typeface="Constantia" panose="02030602050306030303" pitchFamily="18" charset="0"/>
                 <a:cs typeface="Times" panose="02020603050405020304" pitchFamily="18" charset="0"/>
               </a:rPr>
-              <a:t>April 8, 2024</a:t>
+              <a:t>May 28, 2024</a:t>
             </a:fld>
             <a:endParaRPr lang="zh-CN" altLang="en-US" sz="1400" b="1" dirty="0">
               <a:solidFill>
@@ -21771,7 +21753,7 @@
                 <a:latin typeface="Constantia" panose="02030602050306030303" pitchFamily="18" charset="0"/>
                 <a:cs typeface="Times" panose="02020603050405020304" pitchFamily="18" charset="0"/>
               </a:rPr>
-              <a:t>April 8, 2024</a:t>
+              <a:t>May 28, 2024</a:t>
             </a:fld>
             <a:endParaRPr lang="zh-CN" altLang="en-US" sz="1400" b="1" dirty="0">
               <a:solidFill>
@@ -23094,7 +23076,7 @@
                 <a:latin typeface="Constantia" panose="02030602050306030303" pitchFamily="18" charset="0"/>
                 <a:cs typeface="Times" panose="02020603050405020304" pitchFamily="18" charset="0"/>
               </a:rPr>
-              <a:t>April 8, 2024</a:t>
+              <a:t>May 28, 2024</a:t>
             </a:fld>
             <a:endParaRPr lang="zh-CN" altLang="en-US" sz="1400" b="1" dirty="0">
               <a:solidFill>
@@ -23980,7 +23962,7 @@
                 <a:latin typeface="Constantia" panose="02030602050306030303" pitchFamily="18" charset="0"/>
                 <a:cs typeface="Times" panose="02020603050405020304" pitchFamily="18" charset="0"/>
               </a:rPr>
-              <a:t>April 8, 2024</a:t>
+              <a:t>May 28, 2024</a:t>
             </a:fld>
             <a:endParaRPr lang="zh-CN" altLang="en-US" sz="1400" b="1" dirty="0">
               <a:solidFill>
@@ -24780,7 +24762,7 @@
                 <a:latin typeface="Constantia" panose="02030602050306030303" pitchFamily="18" charset="0"/>
                 <a:cs typeface="Times" panose="02020603050405020304" pitchFamily="18" charset="0"/>
               </a:rPr>
-              <a:t>April 8, 2024</a:t>
+              <a:t>May 28, 2024</a:t>
             </a:fld>
             <a:endParaRPr lang="zh-CN" altLang="en-US" sz="1400" b="1" dirty="0">
               <a:solidFill>
